--- a/docs/HairMNL-Theme-Modernization-Deck.pptx
+++ b/docs/HairMNL-Theme-Modernization-Deck.pptx
@@ -15,6 +15,10 @@
     <p:sldId id="263" r:id="rId9"/>
     <p:sldId id="264" r:id="rId10"/>
     <p:sldId id="265" r:id="rId11"/>
+    <p:sldId id="283" r:id="rId34"/>
+    <p:sldId id="284" r:id="rId35"/>
+    <p:sldId id="285" r:id="rId36"/>
+    <p:sldId id="286" r:id="rId37"/>
     <p:sldId id="266" r:id="rId12"/>
     <p:sldId id="267" r:id="rId13"/>
     <p:sldId id="268" r:id="rId14"/>
@@ -3675,7 +3679,7 @@
                 <a:ea typeface="Calibri" pitchFamily="34" charset="-122"/>
                 <a:cs typeface="Calibri" pitchFamily="34" charset="-120"/>
               </a:rPr>
-              <a:t>May 6, 2026</a:t>
+              <a:t>May 14, 2026</a:t>
             </a:r>
             <a:endParaRPr lang="en-US" sz="1400" dirty="0"/>
           </a:p>
@@ -12245,7 +12249,7 @@
                 <a:ea typeface="Calibri" pitchFamily="34" charset="-122"/>
                 <a:cs typeface="Calibri" pitchFamily="34" charset="-120"/>
               </a:rPr>
-              <a:t>−65%</a:t>
+              <a:t>+25.8 pp</a:t>
             </a:r>
             <a:endParaRPr lang="en-US" sz="3600" dirty="0"/>
           </a:p>
@@ -12284,7 +12288,7 @@
                 <a:ea typeface="Calibri" pitchFamily="34" charset="-122"/>
                 <a:cs typeface="Calibri" pitchFamily="34" charset="-120"/>
               </a:rPr>
-              <a:t>vs Apr-26 baseline · TBT median 774 ms desktop (n=4, May 2)</a:t>
+              <a:t>Desktop CLS p75 good 30.5% → 56.3% (May 6 → May 14)</a:t>
             </a:r>
             <a:endParaRPr lang="en-US" sz="900" dirty="0"/>
           </a:p>
@@ -12393,7 +12397,7 @@
                 <a:ea typeface="Calibri" pitchFamily="34" charset="-122"/>
                 <a:cs typeface="Calibri" pitchFamily="34" charset="-120"/>
               </a:rPr>
-              <a:t>−86%</a:t>
+              <a:t>+7.8 pp</a:t>
             </a:r>
             <a:endParaRPr lang="en-US" sz="3600" dirty="0"/>
           </a:p>
@@ -12432,7 +12436,7 @@
                 <a:ea typeface="Calibri" pitchFamily="34" charset="-122"/>
                 <a:cs typeface="Calibri" pitchFamily="34" charset="-120"/>
               </a:rPr>
-              <a:t>TBT 5,600 ms → 774 ms · confirmed real</a:t>
+              <a:t>Mobile CLS p75 good 74.5% → 82.3% (May 6 → May 14)</a:t>
             </a:r>
             <a:endParaRPr lang="en-US" sz="900" dirty="0"/>
           </a:p>
@@ -21086,9 +21090,329 @@
                 <a:ea typeface="Calibri" pitchFamily="34" charset="-122"/>
                 <a:cs typeface="Calibri" pitchFamily="34" charset="-120"/>
               </a:rPr>
-              <a:t>Updated May 6, 2026</a:t>
+              <a:t>Updated May 14, 2026</a:t>
             </a:r>
             <a:endParaRPr lang="en-US" sz="1200" dirty="0"/>
+          </a:p>
+        </p:txBody>
+      </p:sp>
+    </p:spTree>
+  </p:cSld>
+  <p:clrMapOvr>
+    <a:masterClrMapping/>
+  </p:clrMapOvr>
+</p:sld>
+</file>
+
+<file path=ppt/slides/slide28.xml><?xml version="1.0" encoding="utf-8"?>
+<p:sld xmlns:a="http://schemas.openxmlformats.org/drawingml/2006/main" xmlns:p="http://schemas.openxmlformats.org/presentationml/2006/main" xmlns:r="http://schemas.openxmlformats.org/officeDocument/2006/relationships">
+  <p:cSld>
+    <p:spTree>
+      <p:nvGrpSpPr>
+        <p:cNvPr id="1" name=""/>
+        <p:cNvGrpSpPr/>
+        <p:nvPr/>
+      </p:nvGrpSpPr>
+      <p:grpSpPr/>
+      <p:sp>
+        <p:nvSpPr>
+          <p:cNvPr id="2" name="Text 0"/>
+          <p:cNvSpPr/>
+          <p:nvPr/>
+        </p:nvSpPr>
+        <p:spPr>
+          <a:xfrm>
+            <a:off x="457200" y="685800"/>
+            <a:ext cx="11338560" cy="548640"/>
+          </a:xfrm>
+          <a:prstGeom prst="rect">
+            <a:avLst/>
+          </a:prstGeom>
+          <a:noFill/>
+          <a:ln/>
+        </p:spPr>
+        <p:txBody>
+          <a:bodyPr wrap="square" rtlCol="0" anchor="ctr"/>
+          <a:lstStyle/>
+          <a:p>
+            <a:r>
+              <a:t>What we shipped — May 7-14 sprint</a:t>
+            </a:r>
+          </a:p>
+        </p:txBody>
+      </p:sp>
+      <p:sp>
+        <p:nvSpPr>
+          <p:cNvPr id="3" name="Text 1"/>
+          <p:cNvSpPr/>
+          <p:nvPr/>
+        </p:nvSpPr>
+        <p:spPr>
+          <a:xfrm>
+            <a:off x="457200" y="1188720"/>
+            <a:ext cx="11338560" cy="320040"/>
+          </a:xfrm>
+          <a:prstGeom prst="rect">
+            <a:avLst/>
+          </a:prstGeom>
+          <a:noFill/>
+          <a:ln/>
+        </p:spPr>
+        <p:txBody>
+          <a:bodyPr wrap="square" rtlCol="0" anchor="ctr"/>
+          <a:lstStyle/>
+          <a:p>
+            <a:r>
+              <a:t>Phase 2 — 8 days, ~50 issues closed, 11 substantive commits</a:t>
+            </a:r>
+          </a:p>
+        </p:txBody>
+      </p:sp>
+      <p:sp>
+        <p:nvSpPr>
+          <p:cNvPr id="4" name="Shape 2"/>
+          <p:cNvSpPr/>
+          <p:nvPr/>
+        </p:nvSpPr>
+        <p:spPr>
+          <a:xfrm>
+            <a:off x="457200" y="1554480"/>
+            <a:ext cx="1097280" cy="0"/>
+          </a:xfrm>
+          <a:prstGeom prst="line">
+            <a:avLst/>
+          </a:prstGeom>
+          <a:noFill/>
+          <a:ln w="31750">
+            <a:solidFill>
+              <a:srgbClr val="F96167"/>
+            </a:solidFill>
+            <a:prstDash val="solid"/>
+          </a:ln>
+        </p:spPr>
+        <p:txBody>
+          <a:bodyPr/>
+          <a:p>
+            <a:r>
+              <a:t/>
+            </a:r>
+          </a:p>
+        </p:txBody>
+      </p:sp>
+      <p:sp>
+        <p:nvSpPr>
+          <p:cNvPr id="5" name="Text 3"/>
+          <p:cNvSpPr/>
+          <p:nvPr/>
+        </p:nvSpPr>
+        <p:spPr>
+          <a:xfrm>
+            <a:off x="548640" y="1828800"/>
+            <a:ext cx="11155680" cy="4297680"/>
+          </a:xfrm>
+          <a:prstGeom prst="rect">
+            <a:avLst/>
+          </a:prstGeom>
+          <a:noFill/>
+          <a:ln/>
+        </p:spPr>
+        <p:txBody>
+          <a:bodyPr wrap="square" rtlCol="0" anchor="t"/>
+          <a:lstStyle/>
+          <a:p>
+            <a:r>
+              <a:t>Desktop CLS p75 good rate 30.5% → 56.3% (+25.8 pp) — biggest field win</a:t>
+            </a:r>
+          </a:p>
+          <a:p>
+            <a:r>
+              <a:t>Mobile CLS p75 good rate 74.5% → 82.3% (+7.8 pp)</a:t>
+            </a:r>
+          </a:p>
+          <a:p>
+            <a:r>
+              <a:t>GA4 metric_rating fix (d00) — unknown bucket 50% → 5% in 24h, RUM signal now clean</a:t>
+            </a:r>
+          </a:p>
+          <a:p>
+            <a:r>
+              <a:t>49 dead snippet files deleted (BSS Lock + Solution + LTAP)</a:t>
+            </a:r>
+          </a:p>
+          <a:p>
+            <a:r>
+              <a:t>kt0 CSS containment rule codified (lint + Playwright smoke test + .opencode_hints)</a:t>
+            </a:r>
+          </a:p>
+          <a:p>
+            <a:r>
+              <a:t>Dashboard: desktop trend charts + 3-band CWV zones + PSI noise band</a:t>
+            </a:r>
+          </a:p>
+        </p:txBody>
+      </p:sp>
+    </p:spTree>
+  </p:cSld>
+  <p:clrMapOvr>
+    <a:masterClrMapping/>
+  </p:clrMapOvr>
+</p:sld>
+</file>
+
+<file path=ppt/slides/slide29.xml><?xml version="1.0" encoding="utf-8"?>
+<p:sld xmlns:a="http://schemas.openxmlformats.org/drawingml/2006/main" xmlns:p="http://schemas.openxmlformats.org/presentationml/2006/main" xmlns:r="http://schemas.openxmlformats.org/officeDocument/2006/relationships">
+  <p:cSld>
+    <p:spTree>
+      <p:nvGrpSpPr>
+        <p:cNvPr id="1" name=""/>
+        <p:cNvGrpSpPr/>
+        <p:nvPr/>
+      </p:nvGrpSpPr>
+      <p:grpSpPr/>
+      <p:sp>
+        <p:nvSpPr>
+          <p:cNvPr id="2" name="Text 0"/>
+          <p:cNvSpPr/>
+          <p:nvPr/>
+        </p:nvSpPr>
+        <p:spPr>
+          <a:xfrm>
+            <a:off x="457200" y="685800"/>
+            <a:ext cx="11338560" cy="548640"/>
+          </a:xfrm>
+          <a:prstGeom prst="rect">
+            <a:avLst/>
+          </a:prstGeom>
+          <a:noFill/>
+          <a:ln/>
+        </p:spPr>
+        <p:txBody>
+          <a:bodyPr wrap="square" rtlCol="0" anchor="ctr"/>
+          <a:lstStyle/>
+          <a:p>
+            <a:r>
+              <a:t>CLS Phase 2 — desktop focus</a:t>
+            </a:r>
+          </a:p>
+        </p:txBody>
+      </p:sp>
+      <p:sp>
+        <p:nvSpPr>
+          <p:cNvPr id="3" name="Text 1"/>
+          <p:cNvSpPr/>
+          <p:nvPr/>
+        </p:nvSpPr>
+        <p:spPr>
+          <a:xfrm>
+            <a:off x="457200" y="1188720"/>
+            <a:ext cx="11338560" cy="320040"/>
+          </a:xfrm>
+          <a:prstGeom prst="rect">
+            <a:avLst/>
+          </a:prstGeom>
+          <a:noFill/>
+          <a:ln/>
+        </p:spPr>
+        <p:txBody>
+          <a:bodyPr wrap="square" rtlCol="0" anchor="ctr"/>
+          <a:lstStyle/>
+          <a:p>
+            <a:r>
+              <a:t>Six fixes targeting desktop-only contributors the May 2 sprint did not touch</a:t>
+            </a:r>
+          </a:p>
+        </p:txBody>
+      </p:sp>
+      <p:sp>
+        <p:nvSpPr>
+          <p:cNvPr id="4" name="Shape 2"/>
+          <p:cNvSpPr/>
+          <p:nvPr/>
+        </p:nvSpPr>
+        <p:spPr>
+          <a:xfrm>
+            <a:off x="457200" y="1554480"/>
+            <a:ext cx="1097280" cy="0"/>
+          </a:xfrm>
+          <a:prstGeom prst="line">
+            <a:avLst/>
+          </a:prstGeom>
+          <a:noFill/>
+          <a:ln w="31750">
+            <a:solidFill>
+              <a:srgbClr val="F96167"/>
+            </a:solidFill>
+            <a:prstDash val="solid"/>
+          </a:ln>
+        </p:spPr>
+        <p:txBody>
+          <a:bodyPr/>
+          <a:p>
+            <a:r>
+              <a:t/>
+            </a:r>
+          </a:p>
+        </p:txBody>
+      </p:sp>
+      <p:sp>
+        <p:nvSpPr>
+          <p:cNvPr id="5" name="Text 3"/>
+          <p:cNvSpPr/>
+          <p:nvPr/>
+        </p:nvSpPr>
+        <p:spPr>
+          <a:xfrm>
+            <a:off x="548640" y="1828800"/>
+            <a:ext cx="11155680" cy="4297680"/>
+          </a:xfrm>
+          <a:prstGeom prst="rect">
+            <a:avLst/>
+          </a:prstGeom>
+          <a:noFill/>
+          <a:ln/>
+        </p:spPr>
+        <p:txBody>
+          <a:bodyPr wrap="square" rtlCol="0" anchor="t"/>
+          <a:lstStyle/>
+          <a:p>
+            <a:r>
+              <a:t>jvf — Cart-page quantity + price cell min-heights</a:t>
+            </a:r>
+          </a:p>
+          <a:p>
+            <a:r>
+              <a:t>p52 — Judge.me PDP review block (220 px) + collection preview badge (18 px)</a:t>
+            </a:r>
+          </a:p>
+          <a:p>
+            <a:r>
+              <a:t>dzi → hod — BOGOS free-gift container 80 → 160 → 240 px (heavy-promo carts)</a:t>
+            </a:r>
+          </a:p>
+          <a:p>
+            <a:r>
+              <a:t>38l — LimeSpot card image aspect-ratio + object-fit lock</a:t>
+            </a:r>
+          </a:p>
+          <a:p>
+            <a:r>
+              <a:t>ojx — Pro-blogger related-articles thumbnail dimensions (136 URLs)</a:t>
+            </a:r>
+          </a:p>
+          <a:p>
+            <a:r>
+              <a:t>z9y — PDP Judge.me preview badge + gallery zoom yield (884 URLs)</a:t>
+            </a:r>
+          </a:p>
+          <a:p>
+            <a:r>
+              <a:t>987 #1 — Blog article body iframe/video aspect-ratio (YouTube/Vimeo/Instagram)</a:t>
+            </a:r>
+          </a:p>
+          <a:p>
+            <a:r>
+              <a:t>7i0 — Announcement bar ticker height lock (font-FOUT inner shift)</a:t>
+            </a:r>
           </a:p>
         </p:txBody>
       </p:sp>
@@ -23844,6 +24168,311 @@
               <a:t>3</a:t>
             </a:fld>
             <a:endParaRPr lang="en-US"/>
+          </a:p>
+        </p:txBody>
+      </p:sp>
+    </p:spTree>
+  </p:cSld>
+  <p:clrMapOvr>
+    <a:masterClrMapping/>
+  </p:clrMapOvr>
+</p:sld>
+</file>
+
+<file path=ppt/slides/slide30.xml><?xml version="1.0" encoding="utf-8"?>
+<p:sld xmlns:a="http://schemas.openxmlformats.org/drawingml/2006/main" xmlns:p="http://schemas.openxmlformats.org/presentationml/2006/main" xmlns:r="http://schemas.openxmlformats.org/officeDocument/2006/relationships">
+  <p:cSld>
+    <p:spTree>
+      <p:nvGrpSpPr>
+        <p:cNvPr id="1" name=""/>
+        <p:cNvGrpSpPr/>
+        <p:nvPr/>
+      </p:nvGrpSpPr>
+      <p:grpSpPr/>
+      <p:sp>
+        <p:nvSpPr>
+          <p:cNvPr id="2" name="Text 0"/>
+          <p:cNvSpPr/>
+          <p:nvPr/>
+        </p:nvSpPr>
+        <p:spPr>
+          <a:xfrm>
+            <a:off x="457200" y="685800"/>
+            <a:ext cx="11338560" cy="548640"/>
+          </a:xfrm>
+          <a:prstGeom prst="rect">
+            <a:avLst/>
+          </a:prstGeom>
+          <a:noFill/>
+          <a:ln/>
+        </p:spPr>
+        <p:txBody>
+          <a:bodyPr wrap="square" rtlCol="0" anchor="ctr"/>
+          <a:lstStyle/>
+          <a:p>
+            <a:r>
+              <a:t>kt0 CSS containment rule — three layers of prevention</a:t>
+            </a:r>
+          </a:p>
+        </p:txBody>
+      </p:sp>
+      <p:sp>
+        <p:nvSpPr>
+          <p:cNvPr id="3" name="Text 1"/>
+          <p:cNvSpPr/>
+          <p:nvPr/>
+        </p:nvSpPr>
+        <p:spPr>
+          <a:xfrm>
+            <a:off x="457200" y="1188720"/>
+            <a:ext cx="11338560" cy="320040"/>
+          </a:xfrm>
+          <a:prstGeom prst="rect">
+            <a:avLst/>
+          </a:prstGeom>
+          <a:noFill/>
+          <a:ln/>
+        </p:spPr>
+        <p:txBody>
+          <a:bodyPr wrap="square" rtlCol="0" anchor="ctr"/>
+          <a:lstStyle/>
+          <a:p>
+            <a:r>
+              <a:t>After two cart-drawer + Reamaze regressions in three days, this is now policy</a:t>
+            </a:r>
+          </a:p>
+        </p:txBody>
+      </p:sp>
+      <p:sp>
+        <p:nvSpPr>
+          <p:cNvPr id="4" name="Shape 2"/>
+          <p:cNvSpPr/>
+          <p:nvPr/>
+        </p:nvSpPr>
+        <p:spPr>
+          <a:xfrm>
+            <a:off x="457200" y="1554480"/>
+            <a:ext cx="1097280" cy="0"/>
+          </a:xfrm>
+          <a:prstGeom prst="line">
+            <a:avLst/>
+          </a:prstGeom>
+          <a:noFill/>
+          <a:ln w="31750">
+            <a:solidFill>
+              <a:srgbClr val="F96167"/>
+            </a:solidFill>
+            <a:prstDash val="solid"/>
+          </a:ln>
+        </p:spPr>
+        <p:txBody>
+          <a:bodyPr/>
+          <a:p>
+            <a:r>
+              <a:t/>
+            </a:r>
+          </a:p>
+        </p:txBody>
+      </p:sp>
+      <p:sp>
+        <p:nvSpPr>
+          <p:cNvPr id="5" name="Text 3"/>
+          <p:cNvSpPr/>
+          <p:nvPr/>
+        </p:nvSpPr>
+        <p:spPr>
+          <a:xfrm>
+            <a:off x="548640" y="1828800"/>
+            <a:ext cx="11155680" cy="4297680"/>
+          </a:xfrm>
+          <a:prstGeom prst="rect">
+            <a:avLst/>
+          </a:prstGeom>
+          <a:noFill/>
+          <a:ln/>
+        </p:spPr>
+        <p:txBody>
+          <a:bodyPr wrap="square" rtlCol="0" anchor="t"/>
+          <a:lstStyle/>
+          <a:p>
+            <a:r>
+              <a:t>Rule: contain:layout / transform / filter / etc. on a parent of any fixed/abs descendant breaks overlay positioning silently</a:t>
+            </a:r>
+          </a:p>
+          <a:p>
+            <a:r>
+              <a:t>Layer 1 — Lint: scripts/check-overlay-css.py runs in CI on every PR touching .liquid/.css/.scss</a:t>
+            </a:r>
+          </a:p>
+          <a:p>
+            <a:r>
+              <a:t>Layer 2 — Smoke: scripts/smoke-test-drawers.py (Playwright) verifies cart drawer + mobile nav + search + modals on draft before live push</a:t>
+            </a:r>
+          </a:p>
+          <a:p>
+            <a:r>
+              <a:t>Layer 3 — Process: CSS reservation parity hint — grep both css-overrides.liquid AND custom-theme.css before editing</a:t>
+            </a:r>
+          </a:p>
+          <a:p>
+            <a:r>
+              <a:t>Caught the May 13 hod fix shipping as a NO-OP (selector-specificity trap) — computed-style smoke test required for every CSS reservation now</a:t>
+            </a:r>
+          </a:p>
+        </p:txBody>
+      </p:sp>
+    </p:spTree>
+  </p:cSld>
+  <p:clrMapOvr>
+    <a:masterClrMapping/>
+  </p:clrMapOvr>
+</p:sld>
+</file>
+
+<file path=ppt/slides/slide31.xml><?xml version="1.0" encoding="utf-8"?>
+<p:sld xmlns:a="http://schemas.openxmlformats.org/drawingml/2006/main" xmlns:p="http://schemas.openxmlformats.org/presentationml/2006/main" xmlns:r="http://schemas.openxmlformats.org/officeDocument/2006/relationships">
+  <p:cSld>
+    <p:spTree>
+      <p:nvGrpSpPr>
+        <p:cNvPr id="1" name=""/>
+        <p:cNvGrpSpPr/>
+        <p:nvPr/>
+      </p:nvGrpSpPr>
+      <p:grpSpPr/>
+      <p:sp>
+        <p:nvSpPr>
+          <p:cNvPr id="2" name="Text 0"/>
+          <p:cNvSpPr/>
+          <p:nvPr/>
+        </p:nvSpPr>
+        <p:spPr>
+          <a:xfrm>
+            <a:off x="457200" y="685800"/>
+            <a:ext cx="11338560" cy="548640"/>
+          </a:xfrm>
+          <a:prstGeom prst="rect">
+            <a:avLst/>
+          </a:prstGeom>
+          <a:noFill/>
+          <a:ln/>
+        </p:spPr>
+        <p:txBody>
+          <a:bodyPr wrap="square" rtlCol="0" anchor="ctr"/>
+          <a:lstStyle/>
+          <a:p>
+            <a:r>
+              <a:t>GTM observability + third-party app rationalization</a:t>
+            </a:r>
+          </a:p>
+        </p:txBody>
+      </p:sp>
+      <p:sp>
+        <p:nvSpPr>
+          <p:cNvPr id="3" name="Text 1"/>
+          <p:cNvSpPr/>
+          <p:nvPr/>
+        </p:nvSpPr>
+        <p:spPr>
+          <a:xfrm>
+            <a:off x="457200" y="1188720"/>
+            <a:ext cx="11338560" cy="320040"/>
+          </a:xfrm>
+          <a:prstGeom prst="rect">
+            <a:avLst/>
+          </a:prstGeom>
+          <a:noFill/>
+          <a:ln/>
+        </p:spPr>
+        <p:txBody>
+          <a:bodyPr wrap="square" rtlCol="0" anchor="ctr"/>
+          <a:lstStyle/>
+          <a:p>
+            <a:r>
+              <a:t>Real-shopper RUM data is now clean for the first time</a:t>
+            </a:r>
+          </a:p>
+        </p:txBody>
+      </p:sp>
+      <p:sp>
+        <p:nvSpPr>
+          <p:cNvPr id="4" name="Shape 2"/>
+          <p:cNvSpPr/>
+          <p:nvPr/>
+        </p:nvSpPr>
+        <p:spPr>
+          <a:xfrm>
+            <a:off x="457200" y="1554480"/>
+            <a:ext cx="1097280" cy="0"/>
+          </a:xfrm>
+          <a:prstGeom prst="line">
+            <a:avLst/>
+          </a:prstGeom>
+          <a:noFill/>
+          <a:ln w="31750">
+            <a:solidFill>
+              <a:srgbClr val="F96167"/>
+            </a:solidFill>
+            <a:prstDash val="solid"/>
+          </a:ln>
+        </p:spPr>
+        <p:txBody>
+          <a:bodyPr/>
+          <a:p>
+            <a:r>
+              <a:t/>
+            </a:r>
+          </a:p>
+        </p:txBody>
+      </p:sp>
+      <p:sp>
+        <p:nvSpPr>
+          <p:cNvPr id="5" name="Text 3"/>
+          <p:cNvSpPr/>
+          <p:nvPr/>
+        </p:nvSpPr>
+        <p:spPr>
+          <a:xfrm>
+            <a:off x="548640" y="1828800"/>
+            <a:ext cx="11155680" cy="4297680"/>
+          </a:xfrm>
+          <a:prstGeom prst="rect">
+            <a:avLst/>
+          </a:prstGeom>
+          <a:noFill/>
+          <a:ln/>
+        </p:spPr>
+        <p:txBody>
+          <a:bodyPr wrap="square" rtlCol="0" anchor="t"/>
+          <a:lstStyle/>
+          <a:p>
+            <a:r>
+              <a:t>d00 — gtag double-fire fix: metric_rating unknown 50-60% → 2-6% in 24h (LCP/CLS/INP/FCP/TTFB all clean)</a:t>
+            </a:r>
+          </a:p>
+          <a:p>
+            <a:r>
+              <a:t>vux — Reverted a GTM v141 instrumentation regression</a:t>
+            </a:r>
+          </a:p>
+          <a:p>
+            <a:r>
+              <a:t>t4m + 4r8 + miy — Three GTM tags with orphan trigger IDs repaired (Klaviyo, Conversion Linker, TrafficGuard)</a:t>
+            </a:r>
+          </a:p>
+          <a:p>
+            <a:r>
+              <a:t>BSS B2B Lock + Solution + LTAP uninstalled — 49 dead snippets removed, 2 dead fetch() calls per PDP eliminated</a:t>
+            </a:r>
+          </a:p>
+          <a:p>
+            <a:r>
+              <a:t>BookThatApp + VisualQuizBuilder uninstalled — 60-line createElement guard + 2 app block refs removed</a:t>
+            </a:r>
+          </a:p>
+          <a:p>
+            <a:r>
+              <a:t>Customer Portal preserved — gated to backbar-approved customers, zero guest perf cost (Decision 4 narrower now)</a:t>
+            </a:r>
           </a:p>
         </p:txBody>
       </p:sp>
